--- a/public/documents/business-simulation/round-4/section-c/section-c-round4-team-flow-map.pptx
+++ b/public/documents/business-simulation/round-4/section-c/section-c-round4-team-flow-map.pptx
@@ -494,6 +494,10 @@
           </p:nvPr>
         </p:nvSpPr>
         <p:spPr/>
+        <p:txBody>
+          <a:bodyPr/>
+          <a:p/>
+        </p:txBody>
       </p:sp>
       <p:sp>
         <p:nvSpPr>
@@ -510,10 +514,6 @@
           <a:bodyPr/>
           <a:lstStyle/>
           <a:p>
-            <a:r>
-              <a:rPr lang="en-US" dirty="0"/>
-              <a:t>This deck is a pictorial flow map of team rank movement across four rounds. It is built on verified team-name mappings.</a:t>
-            </a:r>
             <a:endParaRPr lang="en-US" dirty="0"/>
           </a:p>
         </p:txBody>
@@ -533,10 +533,6 @@
           <a:bodyPr/>
           <a:lstStyle/>
           <a:p>
-            <a:fld id="{F7021451-1387-4CA6-816F-3879F97B5CBC}" type="slidenum">
-              <a:rPr lang="en-US"/>
-              <a:t>1</a:t>
-            </a:fld>
             <a:endParaRPr lang="en-US"/>
           </a:p>
         </p:txBody>
@@ -582,6 +578,10 @@
           </p:nvPr>
         </p:nvSpPr>
         <p:spPr/>
+        <p:txBody>
+          <a:bodyPr/>
+          <a:p/>
+        </p:txBody>
       </p:sp>
       <p:sp>
         <p:nvSpPr>
@@ -598,10 +598,6 @@
           <a:bodyPr/>
           <a:lstStyle/>
           <a:p>
-            <a:r>
-              <a:rPr lang="en-US" dirty="0"/>
-              <a:t>This slide closes the flow map deck as a teaching tool.</a:t>
-            </a:r>
             <a:endParaRPr lang="en-US" dirty="0"/>
           </a:p>
         </p:txBody>
@@ -621,10 +617,6 @@
           <a:bodyPr/>
           <a:lstStyle/>
           <a:p>
-            <a:fld id="{F7021451-1387-4CA6-816F-3879F97B5CBC}" type="slidenum">
-              <a:rPr lang="en-US"/>
-              <a:t>10</a:t>
-            </a:fld>
             <a:endParaRPr lang="en-US"/>
           </a:p>
         </p:txBody>
@@ -670,6 +662,10 @@
           </p:nvPr>
         </p:nvSpPr>
         <p:spPr/>
+        <p:txBody>
+          <a:bodyPr/>
+          <a:p/>
+        </p:txBody>
       </p:sp>
       <p:sp>
         <p:nvSpPr>
@@ -686,10 +682,6 @@
           <a:bodyPr/>
           <a:lstStyle/>
           <a:p>
-            <a:r>
-              <a:rPr lang="en-US" dirty="0"/>
-              <a:t>Final flow map reminder.</a:t>
-            </a:r>
             <a:endParaRPr lang="en-US" dirty="0"/>
           </a:p>
         </p:txBody>
@@ -709,10 +701,6 @@
           <a:bodyPr/>
           <a:lstStyle/>
           <a:p>
-            <a:fld id="{F7021451-1387-4CA6-816F-3879F97B5CBC}" type="slidenum">
-              <a:rPr lang="en-US"/>
-              <a:t>11</a:t>
-            </a:fld>
             <a:endParaRPr lang="en-US"/>
           </a:p>
         </p:txBody>
@@ -758,6 +746,10 @@
           </p:nvPr>
         </p:nvSpPr>
         <p:spPr/>
+        <p:txBody>
+          <a:bodyPr/>
+          <a:p/>
+        </p:txBody>
       </p:sp>
       <p:sp>
         <p:nvSpPr>
@@ -774,10 +766,6 @@
           <a:bodyPr/>
           <a:lstStyle/>
           <a:p>
-            <a:r>
-              <a:rPr lang="en-US" dirty="0"/>
-              <a:t>Clarify that the flow map is not cosmetic; it prevents false comparisons.</a:t>
-            </a:r>
             <a:endParaRPr lang="en-US" dirty="0"/>
           </a:p>
         </p:txBody>
@@ -797,10 +785,6 @@
           <a:bodyPr/>
           <a:lstStyle/>
           <a:p>
-            <a:fld id="{F7021451-1387-4CA6-816F-3879F97B5CBC}" type="slidenum">
-              <a:rPr lang="en-US"/>
-              <a:t>2</a:t>
-            </a:fld>
             <a:endParaRPr lang="en-US"/>
           </a:p>
         </p:txBody>
@@ -846,6 +830,10 @@
           </p:nvPr>
         </p:nvSpPr>
         <p:spPr/>
+        <p:txBody>
+          <a:bodyPr/>
+          <a:p/>
+        </p:txBody>
       </p:sp>
       <p:sp>
         <p:nvSpPr>
@@ -862,10 +850,6 @@
           <a:bodyPr/>
           <a:lstStyle/>
           <a:p>
-            <a:r>
-              <a:rPr lang="en-US" dirty="0"/>
-              <a:t>Use the bump chart to talk about volatility. Big Bulls compounds rank upward. Green recovers but has financial risk.</a:t>
-            </a:r>
             <a:endParaRPr lang="en-US" dirty="0"/>
           </a:p>
         </p:txBody>
@@ -885,10 +869,6 @@
           <a:bodyPr/>
           <a:lstStyle/>
           <a:p>
-            <a:fld id="{F7021451-1387-4CA6-816F-3879F97B5CBC}" type="slidenum">
-              <a:rPr lang="en-US"/>
-              <a:t>3</a:t>
-            </a:fld>
             <a:endParaRPr lang="en-US"/>
           </a:p>
         </p:txBody>
@@ -934,6 +914,10 @@
           </p:nvPr>
         </p:nvSpPr>
         <p:spPr/>
+        <p:txBody>
+          <a:bodyPr/>
+          <a:p/>
+        </p:txBody>
       </p:sp>
       <p:sp>
         <p:nvSpPr>
@@ -950,10 +934,6 @@
           <a:bodyPr/>
           <a:lstStyle/>
           <a:p>
-            <a:r>
-              <a:rPr lang="en-US" dirty="0"/>
-              <a:t>This slide shows the cumulative TSR trajectory as a compressed flow.</a:t>
-            </a:r>
             <a:endParaRPr lang="en-US" dirty="0"/>
           </a:p>
         </p:txBody>
@@ -973,10 +953,6 @@
           <a:bodyPr/>
           <a:lstStyle/>
           <a:p>
-            <a:fld id="{F7021451-1387-4CA6-816F-3879F97B5CBC}" type="slidenum">
-              <a:rPr lang="en-US"/>
-              <a:t>4</a:t>
-            </a:fld>
             <a:endParaRPr lang="en-US"/>
           </a:p>
         </p:txBody>
@@ -1022,6 +998,10 @@
           </p:nvPr>
         </p:nvSpPr>
         <p:spPr/>
+        <p:txBody>
+          <a:bodyPr/>
+          <a:p/>
+        </p:txBody>
       </p:sp>
       <p:sp>
         <p:nvSpPr>
@@ -1038,10 +1018,6 @@
           <a:bodyPr/>
           <a:lstStyle/>
           <a:p>
-            <a:r>
-              <a:rPr lang="en-US" dirty="0"/>
-              <a:t>Use the table as a bridge from rank flow to operating diagnosis.</a:t>
-            </a:r>
             <a:endParaRPr lang="en-US" dirty="0"/>
           </a:p>
         </p:txBody>
@@ -1061,10 +1037,6 @@
           <a:bodyPr/>
           <a:lstStyle/>
           <a:p>
-            <a:fld id="{F7021451-1387-4CA6-816F-3879F97B5CBC}" type="slidenum">
-              <a:rPr lang="en-US"/>
-              <a:t>5</a:t>
-            </a:fld>
             <a:endParaRPr lang="en-US"/>
           </a:p>
         </p:txBody>
@@ -1110,6 +1082,10 @@
           </p:nvPr>
         </p:nvSpPr>
         <p:spPr/>
+        <p:txBody>
+          <a:bodyPr/>
+          <a:p/>
+        </p:txBody>
       </p:sp>
       <p:sp>
         <p:nvSpPr>
@@ -1126,10 +1102,6 @@
           <a:bodyPr/>
           <a:lstStyle/>
           <a:p>
-            <a:r>
-              <a:rPr lang="en-US" dirty="0"/>
-              <a:t>Universe 2 has a stronger leader but still shows volatility.</a:t>
-            </a:r>
             <a:endParaRPr lang="en-US" dirty="0"/>
           </a:p>
         </p:txBody>
@@ -1149,10 +1121,6 @@
           <a:bodyPr/>
           <a:lstStyle/>
           <a:p>
-            <a:fld id="{F7021451-1387-4CA6-816F-3879F97B5CBC}" type="slidenum">
-              <a:rPr lang="en-US"/>
-              <a:t>6</a:t>
-            </a:fld>
             <a:endParaRPr lang="en-US"/>
           </a:p>
         </p:txBody>
@@ -1198,6 +1166,10 @@
           </p:nvPr>
         </p:nvSpPr>
         <p:spPr/>
+        <p:txBody>
+          <a:bodyPr/>
+          <a:p/>
+        </p:txBody>
       </p:sp>
       <p:sp>
         <p:nvSpPr>
@@ -1214,10 +1186,6 @@
           <a:bodyPr/>
           <a:lstStyle/>
           <a:p>
-            <a:r>
-              <a:rPr lang="en-US" dirty="0"/>
-              <a:t>This slide helps compare the U2 trajectories.</a:t>
-            </a:r>
             <a:endParaRPr lang="en-US" dirty="0"/>
           </a:p>
         </p:txBody>
@@ -1237,10 +1205,6 @@
           <a:bodyPr/>
           <a:lstStyle/>
           <a:p>
-            <a:fld id="{F7021451-1387-4CA6-816F-3879F97B5CBC}" type="slidenum">
-              <a:rPr lang="en-US"/>
-              <a:t>7</a:t>
-            </a:fld>
             <a:endParaRPr lang="en-US"/>
           </a:p>
         </p:txBody>
@@ -1286,6 +1250,10 @@
           </p:nvPr>
         </p:nvSpPr>
         <p:spPr/>
+        <p:txBody>
+          <a:bodyPr/>
+          <a:p/>
+        </p:txBody>
       </p:sp>
       <p:sp>
         <p:nvSpPr>
@@ -1302,10 +1270,6 @@
           <a:bodyPr/>
           <a:lstStyle/>
           <a:p>
-            <a:r>
-              <a:rPr lang="en-US" dirty="0"/>
-              <a:t>Use the table to contrast Blues Clues and Lehman Bros.</a:t>
-            </a:r>
             <a:endParaRPr lang="en-US" dirty="0"/>
           </a:p>
         </p:txBody>
@@ -1325,10 +1289,6 @@
           <a:bodyPr/>
           <a:lstStyle/>
           <a:p>
-            <a:fld id="{F7021451-1387-4CA6-816F-3879F97B5CBC}" type="slidenum">
-              <a:rPr lang="en-US"/>
-              <a:t>8</a:t>
-            </a:fld>
             <a:endParaRPr lang="en-US"/>
           </a:p>
         </p:txBody>
@@ -1374,6 +1334,10 @@
           </p:nvPr>
         </p:nvSpPr>
         <p:spPr/>
+        <p:txBody>
+          <a:bodyPr/>
+          <a:p/>
+        </p:txBody>
       </p:sp>
       <p:sp>
         <p:nvSpPr>
@@ -1390,10 +1354,6 @@
           <a:bodyPr/>
           <a:lstStyle/>
           <a:p>
-            <a:r>
-              <a:rPr lang="en-US" dirty="0"/>
-              <a:t>This is the synthesis slide for flow comparison.</a:t>
-            </a:r>
             <a:endParaRPr lang="en-US" dirty="0"/>
           </a:p>
         </p:txBody>
@@ -1413,10 +1373,6 @@
           <a:bodyPr/>
           <a:lstStyle/>
           <a:p>
-            <a:fld id="{F7021451-1387-4CA6-816F-3879F97B5CBC}" type="slidenum">
-              <a:rPr lang="en-US"/>
-              <a:t>9</a:t>
-            </a:fld>
             <a:endParaRPr lang="en-US"/>
           </a:p>
         </p:txBody>
@@ -2080,6 +2036,10 @@
             <a:prstDash val="solid"/>
           </a:ln>
         </p:spPr>
+        <p:txBody>
+          <a:bodyPr/>
+          <a:p/>
+        </p:txBody>
       </p:sp>
       <p:sp>
         <p:nvSpPr>
@@ -2183,6 +2143,10 @@
             <a:prstDash val="solid"/>
           </a:ln>
         </p:spPr>
+        <p:txBody>
+          <a:bodyPr/>
+          <a:p/>
+        </p:txBody>
       </p:sp>
       <p:sp>
         <p:nvSpPr>
@@ -2249,6 +2213,10 @@
             <a:prstDash val="solid"/>
           </a:ln>
         </p:spPr>
+        <p:txBody>
+          <a:bodyPr/>
+          <a:p/>
+        </p:txBody>
       </p:sp>
       <p:sp>
         <p:nvSpPr>
@@ -2315,6 +2283,10 @@
             <a:prstDash val="solid"/>
           </a:ln>
         </p:spPr>
+        <p:txBody>
+          <a:bodyPr/>
+          <a:p/>
+        </p:txBody>
       </p:sp>
       <p:sp>
         <p:nvSpPr>
@@ -2381,6 +2353,10 @@
             <a:prstDash val="solid"/>
           </a:ln>
         </p:spPr>
+        <p:txBody>
+          <a:bodyPr/>
+          <a:p/>
+        </p:txBody>
       </p:sp>
       <p:sp>
         <p:nvSpPr>
@@ -2447,6 +2423,10 @@
             <a:prstDash val="solid"/>
           </a:ln>
         </p:spPr>
+        <p:txBody>
+          <a:bodyPr/>
+          <a:p/>
+        </p:txBody>
       </p:sp>
       <p:sp>
         <p:nvSpPr>
@@ -2513,6 +2493,10 @@
             <a:prstDash val="solid"/>
           </a:ln>
         </p:spPr>
+        <p:txBody>
+          <a:bodyPr/>
+          <a:p/>
+        </p:txBody>
       </p:sp>
       <p:sp>
         <p:nvSpPr>
@@ -2579,6 +2563,10 @@
             <a:prstDash val="solid"/>
           </a:ln>
         </p:spPr>
+        <p:txBody>
+          <a:bodyPr/>
+          <a:p/>
+        </p:txBody>
       </p:sp>
       <p:sp>
         <p:nvSpPr>
@@ -2645,6 +2633,10 @@
             <a:prstDash val="solid"/>
           </a:ln>
         </p:spPr>
+        <p:txBody>
+          <a:bodyPr/>
+          <a:p/>
+        </p:txBody>
       </p:sp>
       <p:sp>
         <p:nvSpPr>
@@ -2711,6 +2703,10 @@
             <a:prstDash val="solid"/>
           </a:ln>
         </p:spPr>
+        <p:txBody>
+          <a:bodyPr/>
+          <a:p/>
+        </p:txBody>
       </p:sp>
       <p:sp>
         <p:nvSpPr>
@@ -2777,6 +2773,10 @@
             <a:prstDash val="solid"/>
           </a:ln>
         </p:spPr>
+        <p:txBody>
+          <a:bodyPr/>
+          <a:p/>
+        </p:txBody>
       </p:sp>
       <p:sp>
         <p:nvSpPr>
@@ -2847,6 +2847,10 @@
             <a:prstDash val="solid"/>
           </a:ln>
         </p:spPr>
+        <p:txBody>
+          <a:bodyPr/>
+          <a:p/>
+        </p:txBody>
       </p:sp>
       <p:sp>
         <p:nvSpPr>
@@ -3277,6 +3281,10 @@
             <a:prstDash val="solid"/>
           </a:ln>
         </p:spPr>
+        <p:txBody>
+          <a:bodyPr/>
+          <a:p/>
+        </p:txBody>
       </p:sp>
       <p:sp>
         <p:nvSpPr>
@@ -3380,6 +3388,10 @@
             <a:prstDash val="solid"/>
           </a:ln>
         </p:spPr>
+        <p:txBody>
+          <a:bodyPr/>
+          <a:p/>
+        </p:txBody>
       </p:sp>
       <p:sp>
         <p:nvSpPr>
@@ -3446,6 +3458,10 @@
             <a:prstDash val="solid"/>
           </a:ln>
         </p:spPr>
+        <p:txBody>
+          <a:bodyPr/>
+          <a:p/>
+        </p:txBody>
       </p:sp>
       <p:sp>
         <p:nvSpPr>
@@ -3512,6 +3528,10 @@
             <a:prstDash val="solid"/>
           </a:ln>
         </p:spPr>
+        <p:txBody>
+          <a:bodyPr/>
+          <a:p/>
+        </p:txBody>
       </p:sp>
       <p:sp>
         <p:nvSpPr>
@@ -3578,6 +3598,10 @@
             <a:prstDash val="solid"/>
           </a:ln>
         </p:spPr>
+        <p:txBody>
+          <a:bodyPr/>
+          <a:p/>
+        </p:txBody>
       </p:sp>
       <p:sp>
         <p:nvSpPr>
@@ -3644,6 +3668,10 @@
             <a:prstDash val="solid"/>
           </a:ln>
         </p:spPr>
+        <p:txBody>
+          <a:bodyPr/>
+          <a:p/>
+        </p:txBody>
       </p:sp>
       <p:sp>
         <p:nvSpPr>
@@ -3710,6 +3738,10 @@
             <a:prstDash val="solid"/>
           </a:ln>
         </p:spPr>
+        <p:txBody>
+          <a:bodyPr/>
+          <a:p/>
+        </p:txBody>
       </p:sp>
       <p:sp>
         <p:nvSpPr>
@@ -3776,6 +3808,10 @@
             <a:prstDash val="solid"/>
           </a:ln>
         </p:spPr>
+        <p:txBody>
+          <a:bodyPr/>
+          <a:p/>
+        </p:txBody>
       </p:sp>
       <p:sp>
         <p:nvSpPr>
@@ -3842,6 +3878,10 @@
             <a:prstDash val="solid"/>
           </a:ln>
         </p:spPr>
+        <p:txBody>
+          <a:bodyPr/>
+          <a:p/>
+        </p:txBody>
       </p:sp>
       <p:sp>
         <p:nvSpPr>
@@ -3908,6 +3948,10 @@
             <a:prstDash val="solid"/>
           </a:ln>
         </p:spPr>
+        <p:txBody>
+          <a:bodyPr/>
+          <a:p/>
+        </p:txBody>
       </p:sp>
       <p:sp>
         <p:nvSpPr>
@@ -3974,6 +4018,10 @@
             <a:prstDash val="solid"/>
           </a:ln>
         </p:spPr>
+        <p:txBody>
+          <a:bodyPr/>
+          <a:p/>
+        </p:txBody>
       </p:sp>
       <p:sp>
         <p:nvSpPr>
@@ -4040,6 +4088,10 @@
             <a:prstDash val="solid"/>
           </a:ln>
         </p:spPr>
+        <p:txBody>
+          <a:bodyPr/>
+          <a:p/>
+        </p:txBody>
       </p:sp>
       <p:sp>
         <p:nvSpPr>
@@ -4106,6 +4158,10 @@
             <a:prstDash val="solid"/>
           </a:ln>
         </p:spPr>
+        <p:txBody>
+          <a:bodyPr/>
+          <a:p/>
+        </p:txBody>
       </p:sp>
       <p:sp>
         <p:nvSpPr>
@@ -4172,6 +4228,10 @@
             <a:prstDash val="solid"/>
           </a:ln>
         </p:spPr>
+        <p:txBody>
+          <a:bodyPr/>
+          <a:p/>
+        </p:txBody>
       </p:sp>
       <p:sp>
         <p:nvSpPr>
@@ -4238,6 +4298,10 @@
             <a:prstDash val="solid"/>
           </a:ln>
         </p:spPr>
+        <p:txBody>
+          <a:bodyPr/>
+          <a:p/>
+        </p:txBody>
       </p:sp>
       <p:sp>
         <p:nvSpPr>
@@ -4304,6 +4368,10 @@
             <a:prstDash val="solid"/>
           </a:ln>
         </p:spPr>
+        <p:txBody>
+          <a:bodyPr/>
+          <a:p/>
+        </p:txBody>
       </p:sp>
       <p:sp>
         <p:nvSpPr>
@@ -4445,6 +4513,10 @@
             <a:prstDash val="solid"/>
           </a:ln>
         </p:spPr>
+        <p:txBody>
+          <a:bodyPr/>
+          <a:p/>
+        </p:txBody>
       </p:sp>
       <p:sp>
         <p:nvSpPr>
@@ -4697,6 +4769,10 @@
             <a:prstDash val="solid"/>
           </a:ln>
         </p:spPr>
+        <p:txBody>
+          <a:bodyPr/>
+          <a:p/>
+        </p:txBody>
       </p:sp>
       <p:sp>
         <p:nvSpPr>
@@ -4942,6 +5018,10 @@
             <a:prstDash val="solid"/>
           </a:ln>
         </p:spPr>
+        <p:txBody>
+          <a:bodyPr/>
+          <a:p/>
+        </p:txBody>
       </p:sp>
       <p:sp>
         <p:nvSpPr>
@@ -5001,6 +5081,10 @@
             <a:prstDash val="solid"/>
           </a:ln>
         </p:spPr>
+        <p:txBody>
+          <a:bodyPr/>
+          <a:p/>
+        </p:txBody>
       </p:sp>
       <p:sp>
         <p:nvSpPr>
@@ -5060,6 +5144,10 @@
             <a:prstDash val="solid"/>
           </a:ln>
         </p:spPr>
+        <p:txBody>
+          <a:bodyPr/>
+          <a:p/>
+        </p:txBody>
       </p:sp>
       <p:sp>
         <p:nvSpPr>
@@ -5119,6 +5207,10 @@
             <a:prstDash val="solid"/>
           </a:ln>
         </p:spPr>
+        <p:txBody>
+          <a:bodyPr/>
+          <a:p/>
+        </p:txBody>
       </p:sp>
       <p:sp>
         <p:nvSpPr>
@@ -5178,6 +5270,10 @@
             <a:prstDash val="solid"/>
           </a:ln>
         </p:spPr>
+        <p:txBody>
+          <a:bodyPr/>
+          <a:p/>
+        </p:txBody>
       </p:sp>
       <p:sp>
         <p:nvSpPr>
@@ -5237,6 +5333,10 @@
             <a:prstDash val="solid"/>
           </a:ln>
         </p:spPr>
+        <p:txBody>
+          <a:bodyPr/>
+          <a:p/>
+        </p:txBody>
       </p:sp>
       <p:sp>
         <p:nvSpPr>
@@ -5296,6 +5396,10 @@
             <a:prstDash val="solid"/>
           </a:ln>
         </p:spPr>
+        <p:txBody>
+          <a:bodyPr/>
+          <a:p/>
+        </p:txBody>
       </p:sp>
       <p:sp>
         <p:nvSpPr>
@@ -5355,6 +5459,10 @@
             <a:prstDash val="solid"/>
           </a:ln>
         </p:spPr>
+        <p:txBody>
+          <a:bodyPr/>
+          <a:p/>
+        </p:txBody>
       </p:sp>
       <p:sp>
         <p:nvSpPr>
@@ -5378,6 +5486,10 @@
             <a:prstDash val="solid"/>
           </a:ln>
         </p:spPr>
+        <p:txBody>
+          <a:bodyPr/>
+          <a:p/>
+        </p:txBody>
       </p:sp>
       <p:sp>
         <p:nvSpPr>
@@ -5401,6 +5513,10 @@
             <a:prstDash val="solid"/>
           </a:ln>
         </p:spPr>
+        <p:txBody>
+          <a:bodyPr/>
+          <a:p/>
+        </p:txBody>
       </p:sp>
       <p:sp>
         <p:nvSpPr>
@@ -5426,6 +5542,10 @@
             <a:prstDash val="solid"/>
           </a:ln>
         </p:spPr>
+        <p:txBody>
+          <a:bodyPr/>
+          <a:p/>
+        </p:txBody>
       </p:sp>
       <p:sp>
         <p:nvSpPr>
@@ -5451,6 +5571,10 @@
             <a:prstDash val="solid"/>
           </a:ln>
         </p:spPr>
+        <p:txBody>
+          <a:bodyPr/>
+          <a:p/>
+        </p:txBody>
       </p:sp>
       <p:sp>
         <p:nvSpPr>
@@ -5476,6 +5600,10 @@
             <a:prstDash val="solid"/>
           </a:ln>
         </p:spPr>
+        <p:txBody>
+          <a:bodyPr/>
+          <a:p/>
+        </p:txBody>
       </p:sp>
       <p:sp>
         <p:nvSpPr>
@@ -5501,6 +5629,10 @@
             <a:prstDash val="solid"/>
           </a:ln>
         </p:spPr>
+        <p:txBody>
+          <a:bodyPr/>
+          <a:p/>
+        </p:txBody>
       </p:sp>
       <p:sp>
         <p:nvSpPr>
@@ -5567,6 +5699,10 @@
             <a:prstDash val="solid"/>
           </a:ln>
         </p:spPr>
+        <p:txBody>
+          <a:bodyPr/>
+          <a:p/>
+        </p:txBody>
       </p:sp>
       <p:sp>
         <p:nvSpPr>
@@ -5592,6 +5728,10 @@
             <a:prstDash val="solid"/>
           </a:ln>
         </p:spPr>
+        <p:txBody>
+          <a:bodyPr/>
+          <a:p/>
+        </p:txBody>
       </p:sp>
       <p:sp>
         <p:nvSpPr>
@@ -5617,6 +5757,10 @@
             <a:prstDash val="solid"/>
           </a:ln>
         </p:spPr>
+        <p:txBody>
+          <a:bodyPr/>
+          <a:p/>
+        </p:txBody>
       </p:sp>
       <p:sp>
         <p:nvSpPr>
@@ -5642,6 +5786,10 @@
             <a:prstDash val="solid"/>
           </a:ln>
         </p:spPr>
+        <p:txBody>
+          <a:bodyPr/>
+          <a:p/>
+        </p:txBody>
       </p:sp>
       <p:sp>
         <p:nvSpPr>
@@ -5667,6 +5815,10 @@
             <a:prstDash val="solid"/>
           </a:ln>
         </p:spPr>
+        <p:txBody>
+          <a:bodyPr/>
+          <a:p/>
+        </p:txBody>
       </p:sp>
       <p:sp>
         <p:nvSpPr>
@@ -5692,6 +5844,10 @@
             <a:prstDash val="solid"/>
           </a:ln>
         </p:spPr>
+        <p:txBody>
+          <a:bodyPr/>
+          <a:p/>
+        </p:txBody>
       </p:sp>
       <p:sp>
         <p:nvSpPr>
@@ -5717,6 +5873,10 @@
             <a:prstDash val="solid"/>
           </a:ln>
         </p:spPr>
+        <p:txBody>
+          <a:bodyPr/>
+          <a:p/>
+        </p:txBody>
       </p:sp>
       <p:sp>
         <p:nvSpPr>
@@ -5783,6 +5943,10 @@
             <a:prstDash val="solid"/>
           </a:ln>
         </p:spPr>
+        <p:txBody>
+          <a:bodyPr/>
+          <a:p/>
+        </p:txBody>
       </p:sp>
       <p:sp>
         <p:nvSpPr>
@@ -5808,6 +5972,10 @@
             <a:prstDash val="solid"/>
           </a:ln>
         </p:spPr>
+        <p:txBody>
+          <a:bodyPr/>
+          <a:p/>
+        </p:txBody>
       </p:sp>
       <p:sp>
         <p:nvSpPr>
@@ -5833,6 +6001,10 @@
             <a:prstDash val="solid"/>
           </a:ln>
         </p:spPr>
+        <p:txBody>
+          <a:bodyPr/>
+          <a:p/>
+        </p:txBody>
       </p:sp>
       <p:sp>
         <p:nvSpPr>
@@ -5858,6 +6030,10 @@
             <a:prstDash val="solid"/>
           </a:ln>
         </p:spPr>
+        <p:txBody>
+          <a:bodyPr/>
+          <a:p/>
+        </p:txBody>
       </p:sp>
       <p:sp>
         <p:nvSpPr>
@@ -5883,6 +6059,10 @@
             <a:prstDash val="solid"/>
           </a:ln>
         </p:spPr>
+        <p:txBody>
+          <a:bodyPr/>
+          <a:p/>
+        </p:txBody>
       </p:sp>
       <p:sp>
         <p:nvSpPr>
@@ -5908,6 +6088,10 @@
             <a:prstDash val="solid"/>
           </a:ln>
         </p:spPr>
+        <p:txBody>
+          <a:bodyPr/>
+          <a:p/>
+        </p:txBody>
       </p:sp>
       <p:sp>
         <p:nvSpPr>
@@ -5933,6 +6117,10 @@
             <a:prstDash val="solid"/>
           </a:ln>
         </p:spPr>
+        <p:txBody>
+          <a:bodyPr/>
+          <a:p/>
+        </p:txBody>
       </p:sp>
       <p:sp>
         <p:nvSpPr>
@@ -5997,6 +6185,10 @@
             <a:prstDash val="solid"/>
           </a:ln>
         </p:spPr>
+        <p:txBody>
+          <a:bodyPr/>
+          <a:p/>
+        </p:txBody>
       </p:sp>
       <p:sp>
         <p:nvSpPr>
@@ -6020,6 +6212,10 @@
             <a:prstDash val="solid"/>
           </a:ln>
         </p:spPr>
+        <p:txBody>
+          <a:bodyPr/>
+          <a:p/>
+        </p:txBody>
       </p:sp>
       <p:sp>
         <p:nvSpPr>
@@ -6043,6 +6239,10 @@
             <a:prstDash val="solid"/>
           </a:ln>
         </p:spPr>
+        <p:txBody>
+          <a:bodyPr/>
+          <a:p/>
+        </p:txBody>
       </p:sp>
       <p:sp>
         <p:nvSpPr>
@@ -6068,6 +6268,10 @@
             <a:prstDash val="solid"/>
           </a:ln>
         </p:spPr>
+        <p:txBody>
+          <a:bodyPr/>
+          <a:p/>
+        </p:txBody>
       </p:sp>
       <p:sp>
         <p:nvSpPr>
@@ -6093,6 +6297,10 @@
             <a:prstDash val="solid"/>
           </a:ln>
         </p:spPr>
+        <p:txBody>
+          <a:bodyPr/>
+          <a:p/>
+        </p:txBody>
       </p:sp>
       <p:sp>
         <p:nvSpPr>
@@ -6118,6 +6326,10 @@
             <a:prstDash val="solid"/>
           </a:ln>
         </p:spPr>
+        <p:txBody>
+          <a:bodyPr/>
+          <a:p/>
+        </p:txBody>
       </p:sp>
       <p:sp>
         <p:nvSpPr>
@@ -6143,6 +6355,10 @@
             <a:prstDash val="solid"/>
           </a:ln>
         </p:spPr>
+        <p:txBody>
+          <a:bodyPr/>
+          <a:p/>
+        </p:txBody>
       </p:sp>
       <p:sp>
         <p:nvSpPr>
@@ -6209,6 +6425,10 @@
             <a:prstDash val="solid"/>
           </a:ln>
         </p:spPr>
+        <p:txBody>
+          <a:bodyPr/>
+          <a:p/>
+        </p:txBody>
       </p:sp>
       <p:sp>
         <p:nvSpPr>
@@ -6234,6 +6454,10 @@
             <a:prstDash val="solid"/>
           </a:ln>
         </p:spPr>
+        <p:txBody>
+          <a:bodyPr/>
+          <a:p/>
+        </p:txBody>
       </p:sp>
       <p:sp>
         <p:nvSpPr>
@@ -6259,6 +6483,10 @@
             <a:prstDash val="solid"/>
           </a:ln>
         </p:spPr>
+        <p:txBody>
+          <a:bodyPr/>
+          <a:p/>
+        </p:txBody>
       </p:sp>
       <p:sp>
         <p:nvSpPr>
@@ -6284,6 +6512,10 @@
             <a:prstDash val="solid"/>
           </a:ln>
         </p:spPr>
+        <p:txBody>
+          <a:bodyPr/>
+          <a:p/>
+        </p:txBody>
       </p:sp>
       <p:sp>
         <p:nvSpPr>
@@ -6309,6 +6541,10 @@
             <a:prstDash val="solid"/>
           </a:ln>
         </p:spPr>
+        <p:txBody>
+          <a:bodyPr/>
+          <a:p/>
+        </p:txBody>
       </p:sp>
       <p:sp>
         <p:nvSpPr>
@@ -6334,6 +6570,10 @@
             <a:prstDash val="solid"/>
           </a:ln>
         </p:spPr>
+        <p:txBody>
+          <a:bodyPr/>
+          <a:p/>
+        </p:txBody>
       </p:sp>
       <p:sp>
         <p:nvSpPr>
@@ -6359,6 +6599,10 @@
             <a:prstDash val="solid"/>
           </a:ln>
         </p:spPr>
+        <p:txBody>
+          <a:bodyPr/>
+          <a:p/>
+        </p:txBody>
       </p:sp>
       <p:sp>
         <p:nvSpPr>
@@ -6425,6 +6669,10 @@
             <a:prstDash val="solid"/>
           </a:ln>
         </p:spPr>
+        <p:txBody>
+          <a:bodyPr/>
+          <a:p/>
+        </p:txBody>
       </p:sp>
       <p:sp>
         <p:nvSpPr>
@@ -6450,6 +6698,10 @@
             <a:prstDash val="solid"/>
           </a:ln>
         </p:spPr>
+        <p:txBody>
+          <a:bodyPr/>
+          <a:p/>
+        </p:txBody>
       </p:sp>
       <p:sp>
         <p:nvSpPr>
@@ -6475,6 +6727,10 @@
             <a:prstDash val="solid"/>
           </a:ln>
         </p:spPr>
+        <p:txBody>
+          <a:bodyPr/>
+          <a:p/>
+        </p:txBody>
       </p:sp>
       <p:sp>
         <p:nvSpPr>
@@ -6500,6 +6756,10 @@
             <a:prstDash val="solid"/>
           </a:ln>
         </p:spPr>
+        <p:txBody>
+          <a:bodyPr/>
+          <a:p/>
+        </p:txBody>
       </p:sp>
       <p:sp>
         <p:nvSpPr>
@@ -6525,6 +6785,10 @@
             <a:prstDash val="solid"/>
           </a:ln>
         </p:spPr>
+        <p:txBody>
+          <a:bodyPr/>
+          <a:p/>
+        </p:txBody>
       </p:sp>
       <p:sp>
         <p:nvSpPr>
@@ -6550,6 +6814,10 @@
             <a:prstDash val="solid"/>
           </a:ln>
         </p:spPr>
+        <p:txBody>
+          <a:bodyPr/>
+          <a:p/>
+        </p:txBody>
       </p:sp>
       <p:sp>
         <p:nvSpPr>
@@ -6575,6 +6843,10 @@
             <a:prstDash val="solid"/>
           </a:ln>
         </p:spPr>
+        <p:txBody>
+          <a:bodyPr/>
+          <a:p/>
+        </p:txBody>
       </p:sp>
       <p:sp>
         <p:nvSpPr>
@@ -6641,6 +6913,10 @@
             <a:prstDash val="solid"/>
           </a:ln>
         </p:spPr>
+        <p:txBody>
+          <a:bodyPr/>
+          <a:p/>
+        </p:txBody>
       </p:sp>
       <p:sp>
         <p:nvSpPr>
@@ -6666,6 +6942,10 @@
             <a:prstDash val="solid"/>
           </a:ln>
         </p:spPr>
+        <p:txBody>
+          <a:bodyPr/>
+          <a:p/>
+        </p:txBody>
       </p:sp>
       <p:sp>
         <p:nvSpPr>
@@ -6691,6 +6971,10 @@
             <a:prstDash val="solid"/>
           </a:ln>
         </p:spPr>
+        <p:txBody>
+          <a:bodyPr/>
+          <a:p/>
+        </p:txBody>
       </p:sp>
       <p:sp>
         <p:nvSpPr>
@@ -6716,6 +7000,10 @@
             <a:prstDash val="solid"/>
           </a:ln>
         </p:spPr>
+        <p:txBody>
+          <a:bodyPr/>
+          <a:p/>
+        </p:txBody>
       </p:sp>
       <p:sp>
         <p:nvSpPr>
@@ -6741,6 +7029,10 @@
             <a:prstDash val="solid"/>
           </a:ln>
         </p:spPr>
+        <p:txBody>
+          <a:bodyPr/>
+          <a:p/>
+        </p:txBody>
       </p:sp>
       <p:sp>
         <p:nvSpPr>
@@ -6766,6 +7058,10 @@
             <a:prstDash val="solid"/>
           </a:ln>
         </p:spPr>
+        <p:txBody>
+          <a:bodyPr/>
+          <a:p/>
+        </p:txBody>
       </p:sp>
       <p:sp>
         <p:nvSpPr>
@@ -6791,6 +7087,10 @@
             <a:prstDash val="solid"/>
           </a:ln>
         </p:spPr>
+        <p:txBody>
+          <a:bodyPr/>
+          <a:p/>
+        </p:txBody>
       </p:sp>
       <p:sp>
         <p:nvSpPr>
@@ -6947,6 +7247,10 @@
             <a:prstDash val="solid"/>
           </a:ln>
         </p:spPr>
+        <p:txBody>
+          <a:bodyPr/>
+          <a:p/>
+        </p:txBody>
       </p:sp>
       <p:sp>
         <p:nvSpPr>
@@ -7199,6 +7503,10 @@
             <a:prstDash val="solid"/>
           </a:ln>
         </p:spPr>
+        <p:txBody>
+          <a:bodyPr/>
+          <a:p/>
+        </p:txBody>
       </p:sp>
       <p:sp>
         <p:nvSpPr>
@@ -7343,6 +7651,10 @@
             <a:prstDash val="solid"/>
           </a:ln>
         </p:spPr>
+        <p:txBody>
+          <a:bodyPr/>
+          <a:p/>
+        </p:txBody>
       </p:sp>
       <p:sp>
         <p:nvSpPr>
@@ -7405,6 +7717,10 @@
             <a:prstDash val="solid"/>
           </a:ln>
         </p:spPr>
+        <p:txBody>
+          <a:bodyPr/>
+          <a:p/>
+        </p:txBody>
       </p:sp>
       <p:sp>
         <p:nvSpPr>
@@ -7507,6 +7823,10 @@
             <a:prstDash val="solid"/>
           </a:ln>
         </p:spPr>
+        <p:txBody>
+          <a:bodyPr/>
+          <a:p/>
+        </p:txBody>
       </p:sp>
       <p:sp>
         <p:nvSpPr>
@@ -7569,6 +7889,10 @@
             <a:prstDash val="solid"/>
           </a:ln>
         </p:spPr>
+        <p:txBody>
+          <a:bodyPr/>
+          <a:p/>
+        </p:txBody>
       </p:sp>
       <p:sp>
         <p:nvSpPr>
@@ -7671,6 +7995,10 @@
             <a:prstDash val="solid"/>
           </a:ln>
         </p:spPr>
+        <p:txBody>
+          <a:bodyPr/>
+          <a:p/>
+        </p:txBody>
       </p:sp>
       <p:sp>
         <p:nvSpPr>
@@ -7733,6 +8061,10 @@
             <a:prstDash val="solid"/>
           </a:ln>
         </p:spPr>
+        <p:txBody>
+          <a:bodyPr/>
+          <a:p/>
+        </p:txBody>
       </p:sp>
       <p:sp>
         <p:nvSpPr>
@@ -7835,6 +8167,10 @@
             <a:prstDash val="solid"/>
           </a:ln>
         </p:spPr>
+        <p:txBody>
+          <a:bodyPr/>
+          <a:p/>
+        </p:txBody>
       </p:sp>
       <p:sp>
         <p:nvSpPr>
@@ -7897,6 +8233,10 @@
             <a:prstDash val="solid"/>
           </a:ln>
         </p:spPr>
+        <p:txBody>
+          <a:bodyPr/>
+          <a:p/>
+        </p:txBody>
       </p:sp>
       <p:sp>
         <p:nvSpPr>
@@ -7999,6 +8339,10 @@
             <a:prstDash val="solid"/>
           </a:ln>
         </p:spPr>
+        <p:txBody>
+          <a:bodyPr/>
+          <a:p/>
+        </p:txBody>
       </p:sp>
       <p:sp>
         <p:nvSpPr>
@@ -8061,6 +8405,10 @@
             <a:prstDash val="solid"/>
           </a:ln>
         </p:spPr>
+        <p:txBody>
+          <a:bodyPr/>
+          <a:p/>
+        </p:txBody>
       </p:sp>
       <p:sp>
         <p:nvSpPr>
@@ -8163,6 +8511,10 @@
             <a:prstDash val="solid"/>
           </a:ln>
         </p:spPr>
+        <p:txBody>
+          <a:bodyPr/>
+          <a:p/>
+        </p:txBody>
       </p:sp>
       <p:sp>
         <p:nvSpPr>
@@ -8225,6 +8577,10 @@
             <a:prstDash val="solid"/>
           </a:ln>
         </p:spPr>
+        <p:txBody>
+          <a:bodyPr/>
+          <a:p/>
+        </p:txBody>
       </p:sp>
       <p:sp>
         <p:nvSpPr>
@@ -8327,6 +8683,10 @@
             <a:prstDash val="solid"/>
           </a:ln>
         </p:spPr>
+        <p:txBody>
+          <a:bodyPr/>
+          <a:p/>
+        </p:txBody>
       </p:sp>
       <p:sp>
         <p:nvSpPr>
@@ -8389,6 +8749,10 @@
             <a:prstDash val="solid"/>
           </a:ln>
         </p:spPr>
+        <p:txBody>
+          <a:bodyPr/>
+          <a:p/>
+        </p:txBody>
       </p:sp>
       <p:sp>
         <p:nvSpPr>
@@ -8454,6 +8818,10 @@
             <a:prstDash val="solid"/>
           </a:ln>
         </p:spPr>
+        <p:txBody>
+          <a:bodyPr/>
+          <a:p/>
+        </p:txBody>
       </p:sp>
       <p:sp>
         <p:nvSpPr>
@@ -8706,6 +9074,10 @@
             <a:prstDash val="solid"/>
           </a:ln>
         </p:spPr>
+        <p:txBody>
+          <a:bodyPr/>
+          <a:p/>
+        </p:txBody>
       </p:sp>
       <p:sp>
         <p:nvSpPr>
@@ -8809,6 +9181,10 @@
             <a:prstDash val="solid"/>
           </a:ln>
         </p:spPr>
+        <p:txBody>
+          <a:bodyPr/>
+          <a:p/>
+        </p:txBody>
       </p:sp>
       <p:sp>
         <p:nvSpPr>
@@ -8875,6 +9251,10 @@
             <a:prstDash val="solid"/>
           </a:ln>
         </p:spPr>
+        <p:txBody>
+          <a:bodyPr/>
+          <a:p/>
+        </p:txBody>
       </p:sp>
       <p:sp>
         <p:nvSpPr>
@@ -8941,6 +9321,10 @@
             <a:prstDash val="solid"/>
           </a:ln>
         </p:spPr>
+        <p:txBody>
+          <a:bodyPr/>
+          <a:p/>
+        </p:txBody>
       </p:sp>
       <p:sp>
         <p:nvSpPr>
@@ -9007,6 +9391,10 @@
             <a:prstDash val="solid"/>
           </a:ln>
         </p:spPr>
+        <p:txBody>
+          <a:bodyPr/>
+          <a:p/>
+        </p:txBody>
       </p:sp>
       <p:sp>
         <p:nvSpPr>
@@ -9073,6 +9461,10 @@
             <a:prstDash val="solid"/>
           </a:ln>
         </p:spPr>
+        <p:txBody>
+          <a:bodyPr/>
+          <a:p/>
+        </p:txBody>
       </p:sp>
       <p:sp>
         <p:nvSpPr>
@@ -9139,6 +9531,10 @@
             <a:prstDash val="solid"/>
           </a:ln>
         </p:spPr>
+        <p:txBody>
+          <a:bodyPr/>
+          <a:p/>
+        </p:txBody>
       </p:sp>
       <p:sp>
         <p:nvSpPr>
@@ -9205,6 +9601,10 @@
             <a:prstDash val="solid"/>
           </a:ln>
         </p:spPr>
+        <p:txBody>
+          <a:bodyPr/>
+          <a:p/>
+        </p:txBody>
       </p:sp>
       <p:sp>
         <p:nvSpPr>
@@ -9271,6 +9671,10 @@
             <a:prstDash val="solid"/>
           </a:ln>
         </p:spPr>
+        <p:txBody>
+          <a:bodyPr/>
+          <a:p/>
+        </p:txBody>
       </p:sp>
       <p:sp>
         <p:nvSpPr>
@@ -9337,6 +9741,10 @@
             <a:prstDash val="solid"/>
           </a:ln>
         </p:spPr>
+        <p:txBody>
+          <a:bodyPr/>
+          <a:p/>
+        </p:txBody>
       </p:sp>
       <p:sp>
         <p:nvSpPr>
@@ -9403,6 +9811,10 @@
             <a:prstDash val="solid"/>
           </a:ln>
         </p:spPr>
+        <p:txBody>
+          <a:bodyPr/>
+          <a:p/>
+        </p:txBody>
       </p:sp>
       <p:sp>
         <p:nvSpPr>
@@ -9469,6 +9881,10 @@
             <a:prstDash val="solid"/>
           </a:ln>
         </p:spPr>
+        <p:txBody>
+          <a:bodyPr/>
+          <a:p/>
+        </p:txBody>
       </p:sp>
       <p:sp>
         <p:nvSpPr>
@@ -9535,6 +9951,10 @@
             <a:prstDash val="solid"/>
           </a:ln>
         </p:spPr>
+        <p:txBody>
+          <a:bodyPr/>
+          <a:p/>
+        </p:txBody>
       </p:sp>
       <p:sp>
         <p:nvSpPr>
@@ -9601,6 +10021,10 @@
             <a:prstDash val="solid"/>
           </a:ln>
         </p:spPr>
+        <p:txBody>
+          <a:bodyPr/>
+          <a:p/>
+        </p:txBody>
       </p:sp>
       <p:sp>
         <p:nvSpPr>
@@ -9667,6 +10091,10 @@
             <a:prstDash val="solid"/>
           </a:ln>
         </p:spPr>
+        <p:txBody>
+          <a:bodyPr/>
+          <a:p/>
+        </p:txBody>
       </p:sp>
       <p:sp>
         <p:nvSpPr>
@@ -9733,6 +10161,10 @@
             <a:prstDash val="solid"/>
           </a:ln>
         </p:spPr>
+        <p:txBody>
+          <a:bodyPr/>
+          <a:p/>
+        </p:txBody>
       </p:sp>
       <p:sp>
         <p:nvSpPr>
@@ -9799,6 +10231,10 @@
             <a:prstDash val="solid"/>
           </a:ln>
         </p:spPr>
+        <p:txBody>
+          <a:bodyPr/>
+          <a:p/>
+        </p:txBody>
       </p:sp>
       <p:sp>
         <p:nvSpPr>
@@ -9865,6 +10301,10 @@
             <a:prstDash val="solid"/>
           </a:ln>
         </p:spPr>
+        <p:txBody>
+          <a:bodyPr/>
+          <a:p/>
+        </p:txBody>
       </p:sp>
       <p:sp>
         <p:nvSpPr>
@@ -9931,6 +10371,10 @@
             <a:prstDash val="solid"/>
           </a:ln>
         </p:spPr>
+        <p:txBody>
+          <a:bodyPr/>
+          <a:p/>
+        </p:txBody>
       </p:sp>
       <p:sp>
         <p:nvSpPr>
@@ -9997,6 +10441,10 @@
             <a:prstDash val="solid"/>
           </a:ln>
         </p:spPr>
+        <p:txBody>
+          <a:bodyPr/>
+          <a:p/>
+        </p:txBody>
       </p:sp>
       <p:sp>
         <p:nvSpPr>
@@ -10063,6 +10511,10 @@
             <a:prstDash val="solid"/>
           </a:ln>
         </p:spPr>
+        <p:txBody>
+          <a:bodyPr/>
+          <a:p/>
+        </p:txBody>
       </p:sp>
       <p:sp>
         <p:nvSpPr>
@@ -10129,6 +10581,10 @@
             <a:prstDash val="solid"/>
           </a:ln>
         </p:spPr>
+        <p:txBody>
+          <a:bodyPr/>
+          <a:p/>
+        </p:txBody>
       </p:sp>
       <p:sp>
         <p:nvSpPr>
@@ -10195,6 +10651,10 @@
             <a:prstDash val="solid"/>
           </a:ln>
         </p:spPr>
+        <p:txBody>
+          <a:bodyPr/>
+          <a:p/>
+        </p:txBody>
       </p:sp>
       <p:sp>
         <p:nvSpPr>
@@ -10261,6 +10721,10 @@
             <a:prstDash val="solid"/>
           </a:ln>
         </p:spPr>
+        <p:txBody>
+          <a:bodyPr/>
+          <a:p/>
+        </p:txBody>
       </p:sp>
       <p:sp>
         <p:nvSpPr>
@@ -10327,6 +10791,10 @@
             <a:prstDash val="solid"/>
           </a:ln>
         </p:spPr>
+        <p:txBody>
+          <a:bodyPr/>
+          <a:p/>
+        </p:txBody>
       </p:sp>
       <p:sp>
         <p:nvSpPr>
@@ -10393,6 +10861,10 @@
             <a:prstDash val="solid"/>
           </a:ln>
         </p:spPr>
+        <p:txBody>
+          <a:bodyPr/>
+          <a:p/>
+        </p:txBody>
       </p:sp>
       <p:sp>
         <p:nvSpPr>
@@ -10459,6 +10931,10 @@
             <a:prstDash val="solid"/>
           </a:ln>
         </p:spPr>
+        <p:txBody>
+          <a:bodyPr/>
+          <a:p/>
+        </p:txBody>
       </p:sp>
       <p:sp>
         <p:nvSpPr>
@@ -10525,6 +11001,10 @@
             <a:prstDash val="solid"/>
           </a:ln>
         </p:spPr>
+        <p:txBody>
+          <a:bodyPr/>
+          <a:p/>
+        </p:txBody>
       </p:sp>
       <p:sp>
         <p:nvSpPr>
@@ -10591,6 +11071,10 @@
             <a:prstDash val="solid"/>
           </a:ln>
         </p:spPr>
+        <p:txBody>
+          <a:bodyPr/>
+          <a:p/>
+        </p:txBody>
       </p:sp>
       <p:sp>
         <p:nvSpPr>
@@ -10657,6 +11141,10 @@
             <a:prstDash val="solid"/>
           </a:ln>
         </p:spPr>
+        <p:txBody>
+          <a:bodyPr/>
+          <a:p/>
+        </p:txBody>
       </p:sp>
       <p:sp>
         <p:nvSpPr>
@@ -10723,6 +11211,10 @@
             <a:prstDash val="solid"/>
           </a:ln>
         </p:spPr>
+        <p:txBody>
+          <a:bodyPr/>
+          <a:p/>
+        </p:txBody>
       </p:sp>
       <p:sp>
         <p:nvSpPr>
@@ -10789,6 +11281,10 @@
             <a:prstDash val="solid"/>
           </a:ln>
         </p:spPr>
+        <p:txBody>
+          <a:bodyPr/>
+          <a:p/>
+        </p:txBody>
       </p:sp>
       <p:sp>
         <p:nvSpPr>
@@ -10855,6 +11351,10 @@
             <a:prstDash val="solid"/>
           </a:ln>
         </p:spPr>
+        <p:txBody>
+          <a:bodyPr/>
+          <a:p/>
+        </p:txBody>
       </p:sp>
       <p:sp>
         <p:nvSpPr>
@@ -10921,6 +11421,10 @@
             <a:prstDash val="solid"/>
           </a:ln>
         </p:spPr>
+        <p:txBody>
+          <a:bodyPr/>
+          <a:p/>
+        </p:txBody>
       </p:sp>
       <p:sp>
         <p:nvSpPr>
@@ -10987,6 +11491,10 @@
             <a:prstDash val="solid"/>
           </a:ln>
         </p:spPr>
+        <p:txBody>
+          <a:bodyPr/>
+          <a:p/>
+        </p:txBody>
       </p:sp>
       <p:sp>
         <p:nvSpPr>
@@ -11053,6 +11561,10 @@
             <a:prstDash val="solid"/>
           </a:ln>
         </p:spPr>
+        <p:txBody>
+          <a:bodyPr/>
+          <a:p/>
+        </p:txBody>
       </p:sp>
       <p:sp>
         <p:nvSpPr>
@@ -11119,6 +11631,10 @@
             <a:prstDash val="solid"/>
           </a:ln>
         </p:spPr>
+        <p:txBody>
+          <a:bodyPr/>
+          <a:p/>
+        </p:txBody>
       </p:sp>
       <p:sp>
         <p:nvSpPr>
@@ -11185,6 +11701,10 @@
             <a:prstDash val="solid"/>
           </a:ln>
         </p:spPr>
+        <p:txBody>
+          <a:bodyPr/>
+          <a:p/>
+        </p:txBody>
       </p:sp>
       <p:sp>
         <p:nvSpPr>
@@ -11251,6 +11771,10 @@
             <a:prstDash val="solid"/>
           </a:ln>
         </p:spPr>
+        <p:txBody>
+          <a:bodyPr/>
+          <a:p/>
+        </p:txBody>
       </p:sp>
       <p:sp>
         <p:nvSpPr>
@@ -11317,6 +11841,10 @@
             <a:prstDash val="solid"/>
           </a:ln>
         </p:spPr>
+        <p:txBody>
+          <a:bodyPr/>
+          <a:p/>
+        </p:txBody>
       </p:sp>
       <p:sp>
         <p:nvSpPr>
@@ -11383,6 +11911,10 @@
             <a:prstDash val="solid"/>
           </a:ln>
         </p:spPr>
+        <p:txBody>
+          <a:bodyPr/>
+          <a:p/>
+        </p:txBody>
       </p:sp>
       <p:sp>
         <p:nvSpPr>
@@ -11449,6 +11981,10 @@
             <a:prstDash val="solid"/>
           </a:ln>
         </p:spPr>
+        <p:txBody>
+          <a:bodyPr/>
+          <a:p/>
+        </p:txBody>
       </p:sp>
       <p:sp>
         <p:nvSpPr>
@@ -11515,6 +12051,10 @@
             <a:prstDash val="solid"/>
           </a:ln>
         </p:spPr>
+        <p:txBody>
+          <a:bodyPr/>
+          <a:p/>
+        </p:txBody>
       </p:sp>
       <p:sp>
         <p:nvSpPr>
@@ -11581,6 +12121,10 @@
             <a:prstDash val="solid"/>
           </a:ln>
         </p:spPr>
+        <p:txBody>
+          <a:bodyPr/>
+          <a:p/>
+        </p:txBody>
       </p:sp>
       <p:sp>
         <p:nvSpPr>
@@ -11647,6 +12191,10 @@
             <a:prstDash val="solid"/>
           </a:ln>
         </p:spPr>
+        <p:txBody>
+          <a:bodyPr/>
+          <a:p/>
+        </p:txBody>
       </p:sp>
       <p:sp>
         <p:nvSpPr>
@@ -11713,6 +12261,10 @@
             <a:prstDash val="solid"/>
           </a:ln>
         </p:spPr>
+        <p:txBody>
+          <a:bodyPr/>
+          <a:p/>
+        </p:txBody>
       </p:sp>
       <p:sp>
         <p:nvSpPr>
@@ -11779,6 +12331,10 @@
             <a:prstDash val="solid"/>
           </a:ln>
         </p:spPr>
+        <p:txBody>
+          <a:bodyPr/>
+          <a:p/>
+        </p:txBody>
       </p:sp>
       <p:sp>
         <p:nvSpPr>
@@ -11845,6 +12401,10 @@
             <a:prstDash val="solid"/>
           </a:ln>
         </p:spPr>
+        <p:txBody>
+          <a:bodyPr/>
+          <a:p/>
+        </p:txBody>
       </p:sp>
       <p:sp>
         <p:nvSpPr>
@@ -11911,6 +12471,10 @@
             <a:prstDash val="solid"/>
           </a:ln>
         </p:spPr>
+        <p:txBody>
+          <a:bodyPr/>
+          <a:p/>
+        </p:txBody>
       </p:sp>
       <p:sp>
         <p:nvSpPr>
@@ -11981,6 +12545,10 @@
             <a:prstDash val="solid"/>
           </a:ln>
         </p:spPr>
+        <p:txBody>
+          <a:bodyPr/>
+          <a:p/>
+        </p:txBody>
       </p:sp>
       <p:sp>
         <p:nvSpPr>
@@ -12233,6 +12801,10 @@
             <a:prstDash val="solid"/>
           </a:ln>
         </p:spPr>
+        <p:txBody>
+          <a:bodyPr/>
+          <a:p/>
+        </p:txBody>
       </p:sp>
       <p:sp>
         <p:nvSpPr>
@@ -12478,6 +13050,10 @@
             <a:prstDash val="solid"/>
           </a:ln>
         </p:spPr>
+        <p:txBody>
+          <a:bodyPr/>
+          <a:p/>
+        </p:txBody>
       </p:sp>
       <p:sp>
         <p:nvSpPr>
@@ -12537,6 +13113,10 @@
             <a:prstDash val="solid"/>
           </a:ln>
         </p:spPr>
+        <p:txBody>
+          <a:bodyPr/>
+          <a:p/>
+        </p:txBody>
       </p:sp>
       <p:sp>
         <p:nvSpPr>
@@ -12596,6 +13176,10 @@
             <a:prstDash val="solid"/>
           </a:ln>
         </p:spPr>
+        <p:txBody>
+          <a:bodyPr/>
+          <a:p/>
+        </p:txBody>
       </p:sp>
       <p:sp>
         <p:nvSpPr>
@@ -12655,6 +13239,10 @@
             <a:prstDash val="solid"/>
           </a:ln>
         </p:spPr>
+        <p:txBody>
+          <a:bodyPr/>
+          <a:p/>
+        </p:txBody>
       </p:sp>
       <p:sp>
         <p:nvSpPr>
@@ -12714,6 +13302,10 @@
             <a:prstDash val="solid"/>
           </a:ln>
         </p:spPr>
+        <p:txBody>
+          <a:bodyPr/>
+          <a:p/>
+        </p:txBody>
       </p:sp>
       <p:sp>
         <p:nvSpPr>
@@ -12773,6 +13365,10 @@
             <a:prstDash val="solid"/>
           </a:ln>
         </p:spPr>
+        <p:txBody>
+          <a:bodyPr/>
+          <a:p/>
+        </p:txBody>
       </p:sp>
       <p:sp>
         <p:nvSpPr>
@@ -12834,6 +13430,10 @@
             <a:prstDash val="solid"/>
           </a:ln>
         </p:spPr>
+        <p:txBody>
+          <a:bodyPr/>
+          <a:p/>
+        </p:txBody>
       </p:sp>
       <p:sp>
         <p:nvSpPr>
@@ -12859,6 +13459,10 @@
             <a:prstDash val="solid"/>
           </a:ln>
         </p:spPr>
+        <p:txBody>
+          <a:bodyPr/>
+          <a:p/>
+        </p:txBody>
       </p:sp>
       <p:sp>
         <p:nvSpPr>
@@ -12884,6 +13488,10 @@
             <a:prstDash val="solid"/>
           </a:ln>
         </p:spPr>
+        <p:txBody>
+          <a:bodyPr/>
+          <a:p/>
+        </p:txBody>
       </p:sp>
       <p:sp>
         <p:nvSpPr>
@@ -12909,6 +13517,10 @@
             <a:prstDash val="solid"/>
           </a:ln>
         </p:spPr>
+        <p:txBody>
+          <a:bodyPr/>
+          <a:p/>
+        </p:txBody>
       </p:sp>
       <p:sp>
         <p:nvSpPr>
@@ -12934,6 +13546,10 @@
             <a:prstDash val="solid"/>
           </a:ln>
         </p:spPr>
+        <p:txBody>
+          <a:bodyPr/>
+          <a:p/>
+        </p:txBody>
       </p:sp>
       <p:sp>
         <p:nvSpPr>
@@ -12959,6 +13575,10 @@
             <a:prstDash val="solid"/>
           </a:ln>
         </p:spPr>
+        <p:txBody>
+          <a:bodyPr/>
+          <a:p/>
+        </p:txBody>
       </p:sp>
       <p:sp>
         <p:nvSpPr>
@@ -12984,6 +13604,10 @@
             <a:prstDash val="solid"/>
           </a:ln>
         </p:spPr>
+        <p:txBody>
+          <a:bodyPr/>
+          <a:p/>
+        </p:txBody>
       </p:sp>
       <p:sp>
         <p:nvSpPr>
@@ -13050,6 +13674,10 @@
             <a:prstDash val="solid"/>
           </a:ln>
         </p:spPr>
+        <p:txBody>
+          <a:bodyPr/>
+          <a:p/>
+        </p:txBody>
       </p:sp>
       <p:sp>
         <p:nvSpPr>
@@ -13075,6 +13703,10 @@
             <a:prstDash val="solid"/>
           </a:ln>
         </p:spPr>
+        <p:txBody>
+          <a:bodyPr/>
+          <a:p/>
+        </p:txBody>
       </p:sp>
       <p:sp>
         <p:nvSpPr>
@@ -13100,6 +13732,10 @@
             <a:prstDash val="solid"/>
           </a:ln>
         </p:spPr>
+        <p:txBody>
+          <a:bodyPr/>
+          <a:p/>
+        </p:txBody>
       </p:sp>
       <p:sp>
         <p:nvSpPr>
@@ -13125,6 +13761,10 @@
             <a:prstDash val="solid"/>
           </a:ln>
         </p:spPr>
+        <p:txBody>
+          <a:bodyPr/>
+          <a:p/>
+        </p:txBody>
       </p:sp>
       <p:sp>
         <p:nvSpPr>
@@ -13150,6 +13790,10 @@
             <a:prstDash val="solid"/>
           </a:ln>
         </p:spPr>
+        <p:txBody>
+          <a:bodyPr/>
+          <a:p/>
+        </p:txBody>
       </p:sp>
       <p:sp>
         <p:nvSpPr>
@@ -13175,6 +13819,10 @@
             <a:prstDash val="solid"/>
           </a:ln>
         </p:spPr>
+        <p:txBody>
+          <a:bodyPr/>
+          <a:p/>
+        </p:txBody>
       </p:sp>
       <p:sp>
         <p:nvSpPr>
@@ -13200,6 +13848,10 @@
             <a:prstDash val="solid"/>
           </a:ln>
         </p:spPr>
+        <p:txBody>
+          <a:bodyPr/>
+          <a:p/>
+        </p:txBody>
       </p:sp>
       <p:sp>
         <p:nvSpPr>
@@ -13264,6 +13916,10 @@
             <a:prstDash val="solid"/>
           </a:ln>
         </p:spPr>
+        <p:txBody>
+          <a:bodyPr/>
+          <a:p/>
+        </p:txBody>
       </p:sp>
       <p:sp>
         <p:nvSpPr>
@@ -13287,6 +13943,10 @@
             <a:prstDash val="solid"/>
           </a:ln>
         </p:spPr>
+        <p:txBody>
+          <a:bodyPr/>
+          <a:p/>
+        </p:txBody>
       </p:sp>
       <p:sp>
         <p:nvSpPr>
@@ -13310,6 +13970,10 @@
             <a:prstDash val="solid"/>
           </a:ln>
         </p:spPr>
+        <p:txBody>
+          <a:bodyPr/>
+          <a:p/>
+        </p:txBody>
       </p:sp>
       <p:sp>
         <p:nvSpPr>
@@ -13335,6 +13999,10 @@
             <a:prstDash val="solid"/>
           </a:ln>
         </p:spPr>
+        <p:txBody>
+          <a:bodyPr/>
+          <a:p/>
+        </p:txBody>
       </p:sp>
       <p:sp>
         <p:nvSpPr>
@@ -13360,6 +14028,10 @@
             <a:prstDash val="solid"/>
           </a:ln>
         </p:spPr>
+        <p:txBody>
+          <a:bodyPr/>
+          <a:p/>
+        </p:txBody>
       </p:sp>
       <p:sp>
         <p:nvSpPr>
@@ -13385,6 +14057,10 @@
             <a:prstDash val="solid"/>
           </a:ln>
         </p:spPr>
+        <p:txBody>
+          <a:bodyPr/>
+          <a:p/>
+        </p:txBody>
       </p:sp>
       <p:sp>
         <p:nvSpPr>
@@ -13410,6 +14086,10 @@
             <a:prstDash val="solid"/>
           </a:ln>
         </p:spPr>
+        <p:txBody>
+          <a:bodyPr/>
+          <a:p/>
+        </p:txBody>
       </p:sp>
       <p:sp>
         <p:nvSpPr>
@@ -13474,6 +14154,10 @@
             <a:prstDash val="solid"/>
           </a:ln>
         </p:spPr>
+        <p:txBody>
+          <a:bodyPr/>
+          <a:p/>
+        </p:txBody>
       </p:sp>
       <p:sp>
         <p:nvSpPr>
@@ -13497,6 +14181,10 @@
             <a:prstDash val="solid"/>
           </a:ln>
         </p:spPr>
+        <p:txBody>
+          <a:bodyPr/>
+          <a:p/>
+        </p:txBody>
       </p:sp>
       <p:sp>
         <p:nvSpPr>
@@ -13520,6 +14208,10 @@
             <a:prstDash val="solid"/>
           </a:ln>
         </p:spPr>
+        <p:txBody>
+          <a:bodyPr/>
+          <a:p/>
+        </p:txBody>
       </p:sp>
       <p:sp>
         <p:nvSpPr>
@@ -13545,6 +14237,10 @@
             <a:prstDash val="solid"/>
           </a:ln>
         </p:spPr>
+        <p:txBody>
+          <a:bodyPr/>
+          <a:p/>
+        </p:txBody>
       </p:sp>
       <p:sp>
         <p:nvSpPr>
@@ -13570,6 +14266,10 @@
             <a:prstDash val="solid"/>
           </a:ln>
         </p:spPr>
+        <p:txBody>
+          <a:bodyPr/>
+          <a:p/>
+        </p:txBody>
       </p:sp>
       <p:sp>
         <p:nvSpPr>
@@ -13595,6 +14295,10 @@
             <a:prstDash val="solid"/>
           </a:ln>
         </p:spPr>
+        <p:txBody>
+          <a:bodyPr/>
+          <a:p/>
+        </p:txBody>
       </p:sp>
       <p:sp>
         <p:nvSpPr>
@@ -13620,6 +14324,10 @@
             <a:prstDash val="solid"/>
           </a:ln>
         </p:spPr>
+        <p:txBody>
+          <a:bodyPr/>
+          <a:p/>
+        </p:txBody>
       </p:sp>
       <p:sp>
         <p:nvSpPr>
@@ -13686,6 +14394,10 @@
             <a:prstDash val="solid"/>
           </a:ln>
         </p:spPr>
+        <p:txBody>
+          <a:bodyPr/>
+          <a:p/>
+        </p:txBody>
       </p:sp>
       <p:sp>
         <p:nvSpPr>
@@ -13711,6 +14423,10 @@
             <a:prstDash val="solid"/>
           </a:ln>
         </p:spPr>
+        <p:txBody>
+          <a:bodyPr/>
+          <a:p/>
+        </p:txBody>
       </p:sp>
       <p:sp>
         <p:nvSpPr>
@@ -13736,6 +14452,10 @@
             <a:prstDash val="solid"/>
           </a:ln>
         </p:spPr>
+        <p:txBody>
+          <a:bodyPr/>
+          <a:p/>
+        </p:txBody>
       </p:sp>
       <p:sp>
         <p:nvSpPr>
@@ -13761,6 +14481,10 @@
             <a:prstDash val="solid"/>
           </a:ln>
         </p:spPr>
+        <p:txBody>
+          <a:bodyPr/>
+          <a:p/>
+        </p:txBody>
       </p:sp>
       <p:sp>
         <p:nvSpPr>
@@ -13786,6 +14510,10 @@
             <a:prstDash val="solid"/>
           </a:ln>
         </p:spPr>
+        <p:txBody>
+          <a:bodyPr/>
+          <a:p/>
+        </p:txBody>
       </p:sp>
       <p:sp>
         <p:nvSpPr>
@@ -13811,6 +14539,10 @@
             <a:prstDash val="solid"/>
           </a:ln>
         </p:spPr>
+        <p:txBody>
+          <a:bodyPr/>
+          <a:p/>
+        </p:txBody>
       </p:sp>
       <p:sp>
         <p:nvSpPr>
@@ -13836,6 +14568,10 @@
             <a:prstDash val="solid"/>
           </a:ln>
         </p:spPr>
+        <p:txBody>
+          <a:bodyPr/>
+          <a:p/>
+        </p:txBody>
       </p:sp>
       <p:sp>
         <p:nvSpPr>
@@ -13902,6 +14638,10 @@
             <a:prstDash val="solid"/>
           </a:ln>
         </p:spPr>
+        <p:txBody>
+          <a:bodyPr/>
+          <a:p/>
+        </p:txBody>
       </p:sp>
       <p:sp>
         <p:nvSpPr>
@@ -13927,6 +14667,10 @@
             <a:prstDash val="solid"/>
           </a:ln>
         </p:spPr>
+        <p:txBody>
+          <a:bodyPr/>
+          <a:p/>
+        </p:txBody>
       </p:sp>
       <p:sp>
         <p:nvSpPr>
@@ -13952,6 +14696,10 @@
             <a:prstDash val="solid"/>
           </a:ln>
         </p:spPr>
+        <p:txBody>
+          <a:bodyPr/>
+          <a:p/>
+        </p:txBody>
       </p:sp>
       <p:sp>
         <p:nvSpPr>
@@ -13977,6 +14725,10 @@
             <a:prstDash val="solid"/>
           </a:ln>
         </p:spPr>
+        <p:txBody>
+          <a:bodyPr/>
+          <a:p/>
+        </p:txBody>
       </p:sp>
       <p:sp>
         <p:nvSpPr>
@@ -14002,6 +14754,10 @@
             <a:prstDash val="solid"/>
           </a:ln>
         </p:spPr>
+        <p:txBody>
+          <a:bodyPr/>
+          <a:p/>
+        </p:txBody>
       </p:sp>
       <p:sp>
         <p:nvSpPr>
@@ -14027,6 +14783,10 @@
             <a:prstDash val="solid"/>
           </a:ln>
         </p:spPr>
+        <p:txBody>
+          <a:bodyPr/>
+          <a:p/>
+        </p:txBody>
       </p:sp>
       <p:sp>
         <p:nvSpPr>
@@ -14052,6 +14812,10 @@
             <a:prstDash val="solid"/>
           </a:ln>
         </p:spPr>
+        <p:txBody>
+          <a:bodyPr/>
+          <a:p/>
+        </p:txBody>
       </p:sp>
       <p:sp>
         <p:nvSpPr>
@@ -14208,6 +14972,10 @@
             <a:prstDash val="solid"/>
           </a:ln>
         </p:spPr>
+        <p:txBody>
+          <a:bodyPr/>
+          <a:p/>
+        </p:txBody>
       </p:sp>
       <p:sp>
         <p:nvSpPr>
@@ -14460,6 +15228,10 @@
             <a:prstDash val="solid"/>
           </a:ln>
         </p:spPr>
+        <p:txBody>
+          <a:bodyPr/>
+          <a:p/>
+        </p:txBody>
       </p:sp>
       <p:sp>
         <p:nvSpPr>
@@ -14604,6 +15376,10 @@
             <a:prstDash val="solid"/>
           </a:ln>
         </p:spPr>
+        <p:txBody>
+          <a:bodyPr/>
+          <a:p/>
+        </p:txBody>
       </p:sp>
       <p:sp>
         <p:nvSpPr>
@@ -14666,6 +15442,10 @@
             <a:prstDash val="solid"/>
           </a:ln>
         </p:spPr>
+        <p:txBody>
+          <a:bodyPr/>
+          <a:p/>
+        </p:txBody>
       </p:sp>
       <p:sp>
         <p:nvSpPr>
@@ -14768,6 +15548,10 @@
             <a:prstDash val="solid"/>
           </a:ln>
         </p:spPr>
+        <p:txBody>
+          <a:bodyPr/>
+          <a:p/>
+        </p:txBody>
       </p:sp>
       <p:sp>
         <p:nvSpPr>
@@ -14830,6 +15614,10 @@
             <a:prstDash val="solid"/>
           </a:ln>
         </p:spPr>
+        <p:txBody>
+          <a:bodyPr/>
+          <a:p/>
+        </p:txBody>
       </p:sp>
       <p:sp>
         <p:nvSpPr>
@@ -14932,6 +15720,10 @@
             <a:prstDash val="solid"/>
           </a:ln>
         </p:spPr>
+        <p:txBody>
+          <a:bodyPr/>
+          <a:p/>
+        </p:txBody>
       </p:sp>
       <p:sp>
         <p:nvSpPr>
@@ -14994,6 +15786,10 @@
             <a:prstDash val="solid"/>
           </a:ln>
         </p:spPr>
+        <p:txBody>
+          <a:bodyPr/>
+          <a:p/>
+        </p:txBody>
       </p:sp>
       <p:sp>
         <p:nvSpPr>
@@ -15096,6 +15892,10 @@
             <a:prstDash val="solid"/>
           </a:ln>
         </p:spPr>
+        <p:txBody>
+          <a:bodyPr/>
+          <a:p/>
+        </p:txBody>
       </p:sp>
       <p:sp>
         <p:nvSpPr>
@@ -15158,6 +15958,10 @@
             <a:prstDash val="solid"/>
           </a:ln>
         </p:spPr>
+        <p:txBody>
+          <a:bodyPr/>
+          <a:p/>
+        </p:txBody>
       </p:sp>
       <p:sp>
         <p:nvSpPr>
@@ -15260,6 +16064,10 @@
             <a:prstDash val="solid"/>
           </a:ln>
         </p:spPr>
+        <p:txBody>
+          <a:bodyPr/>
+          <a:p/>
+        </p:txBody>
       </p:sp>
       <p:sp>
         <p:nvSpPr>
@@ -15322,6 +16130,10 @@
             <a:prstDash val="solid"/>
           </a:ln>
         </p:spPr>
+        <p:txBody>
+          <a:bodyPr/>
+          <a:p/>
+        </p:txBody>
       </p:sp>
       <p:sp>
         <p:nvSpPr>
@@ -15424,6 +16236,10 @@
             <a:prstDash val="solid"/>
           </a:ln>
         </p:spPr>
+        <p:txBody>
+          <a:bodyPr/>
+          <a:p/>
+        </p:txBody>
       </p:sp>
       <p:sp>
         <p:nvSpPr>
@@ -15486,6 +16302,10 @@
             <a:prstDash val="solid"/>
           </a:ln>
         </p:spPr>
+        <p:txBody>
+          <a:bodyPr/>
+          <a:p/>
+        </p:txBody>
       </p:sp>
       <p:sp>
         <p:nvSpPr>
@@ -15551,6 +16371,10 @@
             <a:prstDash val="solid"/>
           </a:ln>
         </p:spPr>
+        <p:txBody>
+          <a:bodyPr/>
+          <a:p/>
+        </p:txBody>
       </p:sp>
       <p:sp>
         <p:nvSpPr>
@@ -15803,6 +16627,10 @@
             <a:prstDash val="solid"/>
           </a:ln>
         </p:spPr>
+        <p:txBody>
+          <a:bodyPr/>
+          <a:p/>
+        </p:txBody>
       </p:sp>
       <p:sp>
         <p:nvSpPr>
@@ -15906,6 +16734,10 @@
             <a:prstDash val="solid"/>
           </a:ln>
         </p:spPr>
+        <p:txBody>
+          <a:bodyPr/>
+          <a:p/>
+        </p:txBody>
       </p:sp>
       <p:sp>
         <p:nvSpPr>
@@ -15972,6 +16804,10 @@
             <a:prstDash val="solid"/>
           </a:ln>
         </p:spPr>
+        <p:txBody>
+          <a:bodyPr/>
+          <a:p/>
+        </p:txBody>
       </p:sp>
       <p:sp>
         <p:nvSpPr>
@@ -16038,6 +16874,10 @@
             <a:prstDash val="solid"/>
           </a:ln>
         </p:spPr>
+        <p:txBody>
+          <a:bodyPr/>
+          <a:p/>
+        </p:txBody>
       </p:sp>
       <p:sp>
         <p:nvSpPr>
@@ -16104,6 +16944,10 @@
             <a:prstDash val="solid"/>
           </a:ln>
         </p:spPr>
+        <p:txBody>
+          <a:bodyPr/>
+          <a:p/>
+        </p:txBody>
       </p:sp>
       <p:sp>
         <p:nvSpPr>
@@ -16170,6 +17014,10 @@
             <a:prstDash val="solid"/>
           </a:ln>
         </p:spPr>
+        <p:txBody>
+          <a:bodyPr/>
+          <a:p/>
+        </p:txBody>
       </p:sp>
       <p:sp>
         <p:nvSpPr>
@@ -16236,6 +17084,10 @@
             <a:prstDash val="solid"/>
           </a:ln>
         </p:spPr>
+        <p:txBody>
+          <a:bodyPr/>
+          <a:p/>
+        </p:txBody>
       </p:sp>
       <p:sp>
         <p:nvSpPr>
@@ -16302,6 +17154,10 @@
             <a:prstDash val="solid"/>
           </a:ln>
         </p:spPr>
+        <p:txBody>
+          <a:bodyPr/>
+          <a:p/>
+        </p:txBody>
       </p:sp>
       <p:sp>
         <p:nvSpPr>
@@ -16368,6 +17224,10 @@
             <a:prstDash val="solid"/>
           </a:ln>
         </p:spPr>
+        <p:txBody>
+          <a:bodyPr/>
+          <a:p/>
+        </p:txBody>
       </p:sp>
       <p:sp>
         <p:nvSpPr>
@@ -16434,6 +17294,10 @@
             <a:prstDash val="solid"/>
           </a:ln>
         </p:spPr>
+        <p:txBody>
+          <a:bodyPr/>
+          <a:p/>
+        </p:txBody>
       </p:sp>
       <p:sp>
         <p:nvSpPr>
@@ -16500,6 +17364,10 @@
             <a:prstDash val="solid"/>
           </a:ln>
         </p:spPr>
+        <p:txBody>
+          <a:bodyPr/>
+          <a:p/>
+        </p:txBody>
       </p:sp>
       <p:sp>
         <p:nvSpPr>
@@ -16566,6 +17434,10 @@
             <a:prstDash val="solid"/>
           </a:ln>
         </p:spPr>
+        <p:txBody>
+          <a:bodyPr/>
+          <a:p/>
+        </p:txBody>
       </p:sp>
       <p:sp>
         <p:nvSpPr>
@@ -16632,6 +17504,10 @@
             <a:prstDash val="solid"/>
           </a:ln>
         </p:spPr>
+        <p:txBody>
+          <a:bodyPr/>
+          <a:p/>
+        </p:txBody>
       </p:sp>
       <p:sp>
         <p:nvSpPr>
@@ -16698,6 +17574,10 @@
             <a:prstDash val="solid"/>
           </a:ln>
         </p:spPr>
+        <p:txBody>
+          <a:bodyPr/>
+          <a:p/>
+        </p:txBody>
       </p:sp>
       <p:sp>
         <p:nvSpPr>
@@ -16764,6 +17644,10 @@
             <a:prstDash val="solid"/>
           </a:ln>
         </p:spPr>
+        <p:txBody>
+          <a:bodyPr/>
+          <a:p/>
+        </p:txBody>
       </p:sp>
       <p:sp>
         <p:nvSpPr>
@@ -16830,6 +17714,10 @@
             <a:prstDash val="solid"/>
           </a:ln>
         </p:spPr>
+        <p:txBody>
+          <a:bodyPr/>
+          <a:p/>
+        </p:txBody>
       </p:sp>
       <p:sp>
         <p:nvSpPr>
@@ -16896,6 +17784,10 @@
             <a:prstDash val="solid"/>
           </a:ln>
         </p:spPr>
+        <p:txBody>
+          <a:bodyPr/>
+          <a:p/>
+        </p:txBody>
       </p:sp>
       <p:sp>
         <p:nvSpPr>
@@ -16962,6 +17854,10 @@
             <a:prstDash val="solid"/>
           </a:ln>
         </p:spPr>
+        <p:txBody>
+          <a:bodyPr/>
+          <a:p/>
+        </p:txBody>
       </p:sp>
       <p:sp>
         <p:nvSpPr>
@@ -17028,6 +17924,10 @@
             <a:prstDash val="solid"/>
           </a:ln>
         </p:spPr>
+        <p:txBody>
+          <a:bodyPr/>
+          <a:p/>
+        </p:txBody>
       </p:sp>
       <p:sp>
         <p:nvSpPr>
@@ -17094,6 +17994,10 @@
             <a:prstDash val="solid"/>
           </a:ln>
         </p:spPr>
+        <p:txBody>
+          <a:bodyPr/>
+          <a:p/>
+        </p:txBody>
       </p:sp>
       <p:sp>
         <p:nvSpPr>
@@ -17160,6 +18064,10 @@
             <a:prstDash val="solid"/>
           </a:ln>
         </p:spPr>
+        <p:txBody>
+          <a:bodyPr/>
+          <a:p/>
+        </p:txBody>
       </p:sp>
       <p:sp>
         <p:nvSpPr>
@@ -17226,6 +18134,10 @@
             <a:prstDash val="solid"/>
           </a:ln>
         </p:spPr>
+        <p:txBody>
+          <a:bodyPr/>
+          <a:p/>
+        </p:txBody>
       </p:sp>
       <p:sp>
         <p:nvSpPr>
@@ -17292,6 +18204,10 @@
             <a:prstDash val="solid"/>
           </a:ln>
         </p:spPr>
+        <p:txBody>
+          <a:bodyPr/>
+          <a:p/>
+        </p:txBody>
       </p:sp>
       <p:sp>
         <p:nvSpPr>
@@ -17358,6 +18274,10 @@
             <a:prstDash val="solid"/>
           </a:ln>
         </p:spPr>
+        <p:txBody>
+          <a:bodyPr/>
+          <a:p/>
+        </p:txBody>
       </p:sp>
       <p:sp>
         <p:nvSpPr>
@@ -17424,6 +18344,10 @@
             <a:prstDash val="solid"/>
           </a:ln>
         </p:spPr>
+        <p:txBody>
+          <a:bodyPr/>
+          <a:p/>
+        </p:txBody>
       </p:sp>
       <p:sp>
         <p:nvSpPr>
@@ -17490,6 +18414,10 @@
             <a:prstDash val="solid"/>
           </a:ln>
         </p:spPr>
+        <p:txBody>
+          <a:bodyPr/>
+          <a:p/>
+        </p:txBody>
       </p:sp>
       <p:sp>
         <p:nvSpPr>
@@ -17556,6 +18484,10 @@
             <a:prstDash val="solid"/>
           </a:ln>
         </p:spPr>
+        <p:txBody>
+          <a:bodyPr/>
+          <a:p/>
+        </p:txBody>
       </p:sp>
       <p:sp>
         <p:nvSpPr>
@@ -17622,6 +18554,10 @@
             <a:prstDash val="solid"/>
           </a:ln>
         </p:spPr>
+        <p:txBody>
+          <a:bodyPr/>
+          <a:p/>
+        </p:txBody>
       </p:sp>
       <p:sp>
         <p:nvSpPr>
@@ -17688,6 +18624,10 @@
             <a:prstDash val="solid"/>
           </a:ln>
         </p:spPr>
+        <p:txBody>
+          <a:bodyPr/>
+          <a:p/>
+        </p:txBody>
       </p:sp>
       <p:sp>
         <p:nvSpPr>
@@ -17754,6 +18694,10 @@
             <a:prstDash val="solid"/>
           </a:ln>
         </p:spPr>
+        <p:txBody>
+          <a:bodyPr/>
+          <a:p/>
+        </p:txBody>
       </p:sp>
       <p:sp>
         <p:nvSpPr>
@@ -17820,6 +18764,10 @@
             <a:prstDash val="solid"/>
           </a:ln>
         </p:spPr>
+        <p:txBody>
+          <a:bodyPr/>
+          <a:p/>
+        </p:txBody>
       </p:sp>
       <p:sp>
         <p:nvSpPr>
@@ -17886,6 +18834,10 @@
             <a:prstDash val="solid"/>
           </a:ln>
         </p:spPr>
+        <p:txBody>
+          <a:bodyPr/>
+          <a:p/>
+        </p:txBody>
       </p:sp>
       <p:sp>
         <p:nvSpPr>
@@ -17952,6 +18904,10 @@
             <a:prstDash val="solid"/>
           </a:ln>
         </p:spPr>
+        <p:txBody>
+          <a:bodyPr/>
+          <a:p/>
+        </p:txBody>
       </p:sp>
       <p:sp>
         <p:nvSpPr>
@@ -18018,6 +18974,10 @@
             <a:prstDash val="solid"/>
           </a:ln>
         </p:spPr>
+        <p:txBody>
+          <a:bodyPr/>
+          <a:p/>
+        </p:txBody>
       </p:sp>
       <p:sp>
         <p:nvSpPr>
@@ -18084,6 +19044,10 @@
             <a:prstDash val="solid"/>
           </a:ln>
         </p:spPr>
+        <p:txBody>
+          <a:bodyPr/>
+          <a:p/>
+        </p:txBody>
       </p:sp>
       <p:sp>
         <p:nvSpPr>
@@ -18150,6 +19114,10 @@
             <a:prstDash val="solid"/>
           </a:ln>
         </p:spPr>
+        <p:txBody>
+          <a:bodyPr/>
+          <a:p/>
+        </p:txBody>
       </p:sp>
       <p:sp>
         <p:nvSpPr>
@@ -18216,6 +19184,10 @@
             <a:prstDash val="solid"/>
           </a:ln>
         </p:spPr>
+        <p:txBody>
+          <a:bodyPr/>
+          <a:p/>
+        </p:txBody>
       </p:sp>
       <p:sp>
         <p:nvSpPr>
@@ -18282,6 +19254,10 @@
             <a:prstDash val="solid"/>
           </a:ln>
         </p:spPr>
+        <p:txBody>
+          <a:bodyPr/>
+          <a:p/>
+        </p:txBody>
       </p:sp>
       <p:sp>
         <p:nvSpPr>
@@ -18348,6 +19324,10 @@
             <a:prstDash val="solid"/>
           </a:ln>
         </p:spPr>
+        <p:txBody>
+          <a:bodyPr/>
+          <a:p/>
+        </p:txBody>
       </p:sp>
       <p:sp>
         <p:nvSpPr>
@@ -18414,6 +19394,10 @@
             <a:prstDash val="solid"/>
           </a:ln>
         </p:spPr>
+        <p:txBody>
+          <a:bodyPr/>
+          <a:p/>
+        </p:txBody>
       </p:sp>
       <p:sp>
         <p:nvSpPr>
@@ -18480,6 +19464,10 @@
             <a:prstDash val="solid"/>
           </a:ln>
         </p:spPr>
+        <p:txBody>
+          <a:bodyPr/>
+          <a:p/>
+        </p:txBody>
       </p:sp>
       <p:sp>
         <p:nvSpPr>
@@ -18546,6 +19534,10 @@
             <a:prstDash val="solid"/>
           </a:ln>
         </p:spPr>
+        <p:txBody>
+          <a:bodyPr/>
+          <a:p/>
+        </p:txBody>
       </p:sp>
       <p:sp>
         <p:nvSpPr>
@@ -18612,6 +19604,10 @@
             <a:prstDash val="solid"/>
           </a:ln>
         </p:spPr>
+        <p:txBody>
+          <a:bodyPr/>
+          <a:p/>
+        </p:txBody>
       </p:sp>
       <p:sp>
         <p:nvSpPr>
@@ -18682,6 +19678,10 @@
             <a:prstDash val="solid"/>
           </a:ln>
         </p:spPr>
+        <p:txBody>
+          <a:bodyPr/>
+          <a:p/>
+        </p:txBody>
       </p:sp>
       <p:sp>
         <p:nvSpPr>
@@ -18934,6 +19934,10 @@
             <a:prstDash val="solid"/>
           </a:ln>
         </p:spPr>
+        <p:txBody>
+          <a:bodyPr/>
+          <a:p/>
+        </p:txBody>
       </p:sp>
       <p:sp>
         <p:nvSpPr>
@@ -19078,6 +20082,10 @@
             <a:prstDash val="solid"/>
           </a:ln>
         </p:spPr>
+        <p:txBody>
+          <a:bodyPr/>
+          <a:p/>
+        </p:txBody>
       </p:sp>
       <p:sp>
         <p:nvSpPr>
@@ -19183,6 +20191,10 @@
             <a:prstDash val="solid"/>
           </a:ln>
         </p:spPr>
+        <p:txBody>
+          <a:bodyPr/>
+          <a:p/>
+        </p:txBody>
       </p:sp>
       <p:sp>
         <p:nvSpPr>
@@ -19288,6 +20300,10 @@
             <a:prstDash val="solid"/>
           </a:ln>
         </p:spPr>
+        <p:txBody>
+          <a:bodyPr/>
+          <a:p/>
+        </p:txBody>
       </p:sp>
       <p:sp>
         <p:nvSpPr>
@@ -19393,6 +20409,10 @@
             <a:prstDash val="solid"/>
           </a:ln>
         </p:spPr>
+        <p:txBody>
+          <a:bodyPr/>
+          <a:p/>
+        </p:txBody>
       </p:sp>
       <p:sp>
         <p:nvSpPr>
@@ -19532,6 +20552,10 @@
             <a:prstDash val="solid"/>
           </a:ln>
         </p:spPr>
+        <p:txBody>
+          <a:bodyPr/>
+          <a:p/>
+        </p:txBody>
       </p:sp>
       <p:sp>
         <p:nvSpPr>
